--- a/3-Master_Plan/re_entry/HEROs_and_PASSes/slides/auto/CHAR_PD22_espn_coverage_by_season_AUTO.pptx
+++ b/3-Master_Plan/re_entry/HEROs_and_PASSes/slides/auto/CHAR_PD22_espn_coverage_by_season_AUTO.pptx
@@ -5,9 +5,9 @@
     <p:sldMasterId id="2147483648" r:id="rId1"/>
   </p:sldMasterIdLst>
   <p:sldIdLst>
-    <p:sldId id="256" r:id="rId2"/>
+    <p:sldId id="256" r:id="rId7"/>
   </p:sldIdLst>
-  <p:sldSz cx="12192000" cy="6858000"/>
+  <p:sldSz cx="12191695" cy="6858000" type="screen4x3"/>
   <p:notesSz cx="6858000" cy="9144000"/>
   <p:defaultTextStyle>
     <a:defPPr>
@@ -104,22 +104,6 @@
       </a:defRPr>
     </a:lvl9pPr>
   </p:defaultTextStyle>
-  <p:extLst>
-    <p:ext uri="{EFAFB233-063F-42B5-8137-9DF3F51BA10A}">
-      <p15:sldGuideLst xmlns:p15="http://schemas.microsoft.com/office/powerpoint/2012/main">
-        <p15:guide id="1" orient="horz" pos="2160">
-          <p15:clr>
-            <a:srgbClr val="A4A3A4"/>
-          </p15:clr>
-        </p15:guide>
-        <p15:guide id="2" pos="2880">
-          <p15:clr>
-            <a:srgbClr val="A4A3A4"/>
-          </p15:clr>
-        </p15:guide>
-      </p15:sldGuideLst>
-    </p:ext>
-  </p:extLst>
 </p:presentation>
 </file>
 
@@ -161,9 +145,10 @@
           <a:lstStyle/>
           <a:p>
             <a:r>
-              <a:rPr lang="en-US"/>
+              <a:rPr lang="en-US" smtClean="0"/>
               <a:t>Click to edit Master title style</a:t>
             </a:r>
+            <a:endParaRPr lang="en-US"/>
           </a:p>
         </p:txBody>
       </p:sp>
@@ -279,9 +264,10 @@
           </a:lstStyle>
           <a:p>
             <a:r>
-              <a:rPr lang="en-US"/>
+              <a:rPr lang="en-US" smtClean="0"/>
               <a:t>Click to edit Master subtitle style</a:t>
             </a:r>
+            <a:endParaRPr lang="en-US"/>
           </a:p>
         </p:txBody>
       </p:sp>
@@ -302,7 +288,7 @@
           <a:p>
             <a:fld id="{5BCAD085-E8A6-8845-BD4E-CB4CCA059FC4}" type="datetimeFigureOut">
               <a:rPr lang="en-US" smtClean="0"/>
-              <a:t>8/17/26</a:t>
+              <a:t>1/27/13</a:t>
             </a:fld>
             <a:endParaRPr lang="en-US"/>
           </a:p>
@@ -396,9 +382,10 @@
           <a:lstStyle/>
           <a:p>
             <a:r>
-              <a:rPr lang="en-US"/>
+              <a:rPr lang="en-US" smtClean="0"/>
               <a:t>Click to edit Master title style</a:t>
             </a:r>
+            <a:endParaRPr lang="en-US"/>
           </a:p>
         </p:txBody>
       </p:sp>
@@ -419,37 +406,38 @@
           <a:p>
             <a:pPr lvl="0"/>
             <a:r>
-              <a:rPr lang="en-US"/>
+              <a:rPr lang="en-US" smtClean="0"/>
               <a:t>Click to edit Master text styles</a:t>
             </a:r>
           </a:p>
           <a:p>
             <a:pPr lvl="1"/>
             <a:r>
-              <a:rPr lang="en-US"/>
+              <a:rPr lang="en-US" smtClean="0"/>
               <a:t>Second level</a:t>
             </a:r>
           </a:p>
           <a:p>
             <a:pPr lvl="2"/>
             <a:r>
-              <a:rPr lang="en-US"/>
+              <a:rPr lang="en-US" smtClean="0"/>
               <a:t>Third level</a:t>
             </a:r>
           </a:p>
           <a:p>
             <a:pPr lvl="3"/>
             <a:r>
-              <a:rPr lang="en-US"/>
+              <a:rPr lang="en-US" smtClean="0"/>
               <a:t>Fourth level</a:t>
             </a:r>
           </a:p>
           <a:p>
             <a:pPr lvl="4"/>
             <a:r>
-              <a:rPr lang="en-US"/>
+              <a:rPr lang="en-US" smtClean="0"/>
               <a:t>Fifth level</a:t>
             </a:r>
+            <a:endParaRPr lang="en-US"/>
           </a:p>
         </p:txBody>
       </p:sp>
@@ -470,7 +458,7 @@
           <a:p>
             <a:fld id="{5BCAD085-E8A6-8845-BD4E-CB4CCA059FC4}" type="datetimeFigureOut">
               <a:rPr lang="en-US" smtClean="0"/>
-              <a:t>8/17/26</a:t>
+              <a:t>1/27/13</a:t>
             </a:fld>
             <a:endParaRPr lang="en-US"/>
           </a:p>
@@ -569,9 +557,10 @@
           <a:lstStyle/>
           <a:p>
             <a:r>
-              <a:rPr lang="en-US"/>
+              <a:rPr lang="en-US" smtClean="0"/>
               <a:t>Click to edit Master title style</a:t>
             </a:r>
+            <a:endParaRPr lang="en-US"/>
           </a:p>
         </p:txBody>
       </p:sp>
@@ -597,37 +586,38 @@
           <a:p>
             <a:pPr lvl="0"/>
             <a:r>
-              <a:rPr lang="en-US"/>
+              <a:rPr lang="en-US" smtClean="0"/>
               <a:t>Click to edit Master text styles</a:t>
             </a:r>
           </a:p>
           <a:p>
             <a:pPr lvl="1"/>
             <a:r>
-              <a:rPr lang="en-US"/>
+              <a:rPr lang="en-US" smtClean="0"/>
               <a:t>Second level</a:t>
             </a:r>
           </a:p>
           <a:p>
             <a:pPr lvl="2"/>
             <a:r>
-              <a:rPr lang="en-US"/>
+              <a:rPr lang="en-US" smtClean="0"/>
               <a:t>Third level</a:t>
             </a:r>
           </a:p>
           <a:p>
             <a:pPr lvl="3"/>
             <a:r>
-              <a:rPr lang="en-US"/>
+              <a:rPr lang="en-US" smtClean="0"/>
               <a:t>Fourth level</a:t>
             </a:r>
           </a:p>
           <a:p>
             <a:pPr lvl="4"/>
             <a:r>
-              <a:rPr lang="en-US"/>
+              <a:rPr lang="en-US" smtClean="0"/>
               <a:t>Fifth level</a:t>
             </a:r>
+            <a:endParaRPr lang="en-US"/>
           </a:p>
         </p:txBody>
       </p:sp>
@@ -648,7 +638,7 @@
           <a:p>
             <a:fld id="{5BCAD085-E8A6-8845-BD4E-CB4CCA059FC4}" type="datetimeFigureOut">
               <a:rPr lang="en-US" smtClean="0"/>
-              <a:t>8/17/26</a:t>
+              <a:t>1/27/13</a:t>
             </a:fld>
             <a:endParaRPr lang="en-US"/>
           </a:p>
@@ -742,9 +732,10 @@
           <a:lstStyle/>
           <a:p>
             <a:r>
-              <a:rPr lang="en-US"/>
+              <a:rPr lang="en-US" smtClean="0"/>
               <a:t>Click to edit Master title style</a:t>
             </a:r>
+            <a:endParaRPr lang="en-US"/>
           </a:p>
         </p:txBody>
       </p:sp>
@@ -765,37 +756,38 @@
           <a:p>
             <a:pPr lvl="0"/>
             <a:r>
-              <a:rPr lang="en-US"/>
+              <a:rPr lang="en-US" smtClean="0"/>
               <a:t>Click to edit Master text styles</a:t>
             </a:r>
           </a:p>
           <a:p>
             <a:pPr lvl="1"/>
             <a:r>
-              <a:rPr lang="en-US"/>
+              <a:rPr lang="en-US" smtClean="0"/>
               <a:t>Second level</a:t>
             </a:r>
           </a:p>
           <a:p>
             <a:pPr lvl="2"/>
             <a:r>
-              <a:rPr lang="en-US"/>
+              <a:rPr lang="en-US" smtClean="0"/>
               <a:t>Third level</a:t>
             </a:r>
           </a:p>
           <a:p>
             <a:pPr lvl="3"/>
             <a:r>
-              <a:rPr lang="en-US"/>
+              <a:rPr lang="en-US" smtClean="0"/>
               <a:t>Fourth level</a:t>
             </a:r>
           </a:p>
           <a:p>
             <a:pPr lvl="4"/>
             <a:r>
-              <a:rPr lang="en-US"/>
+              <a:rPr lang="en-US" smtClean="0"/>
               <a:t>Fifth level</a:t>
             </a:r>
+            <a:endParaRPr lang="en-US"/>
           </a:p>
         </p:txBody>
       </p:sp>
@@ -816,7 +808,7 @@
           <a:p>
             <a:fld id="{5BCAD085-E8A6-8845-BD4E-CB4CCA059FC4}" type="datetimeFigureOut">
               <a:rPr lang="en-US" smtClean="0"/>
-              <a:t>8/17/26</a:t>
+              <a:t>1/27/13</a:t>
             </a:fld>
             <a:endParaRPr lang="en-US"/>
           </a:p>
@@ -919,9 +911,10 @@
           </a:lstStyle>
           <a:p>
             <a:r>
-              <a:rPr lang="en-US"/>
+              <a:rPr lang="en-US" smtClean="0"/>
               <a:t>Click to edit Master title style</a:t>
             </a:r>
+            <a:endParaRPr lang="en-US"/>
           </a:p>
         </p:txBody>
       </p:sp>
@@ -1038,7 +1031,7 @@
           <a:p>
             <a:pPr lvl="0"/>
             <a:r>
-              <a:rPr lang="en-US"/>
+              <a:rPr lang="en-US" smtClean="0"/>
               <a:t>Click to edit Master text styles</a:t>
             </a:r>
           </a:p>
@@ -1061,7 +1054,7 @@
           <a:p>
             <a:fld id="{5BCAD085-E8A6-8845-BD4E-CB4CCA059FC4}" type="datetimeFigureOut">
               <a:rPr lang="en-US" smtClean="0"/>
-              <a:t>8/17/26</a:t>
+              <a:t>1/27/13</a:t>
             </a:fld>
             <a:endParaRPr lang="en-US"/>
           </a:p>
@@ -1155,9 +1148,10 @@
           <a:lstStyle/>
           <a:p>
             <a:r>
-              <a:rPr lang="en-US"/>
+              <a:rPr lang="en-US" smtClean="0"/>
               <a:t>Click to edit Master title style</a:t>
             </a:r>
+            <a:endParaRPr lang="en-US"/>
           </a:p>
         </p:txBody>
       </p:sp>
@@ -1211,37 +1205,38 @@
           <a:p>
             <a:pPr lvl="0"/>
             <a:r>
-              <a:rPr lang="en-US"/>
+              <a:rPr lang="en-US" smtClean="0"/>
               <a:t>Click to edit Master text styles</a:t>
             </a:r>
           </a:p>
           <a:p>
             <a:pPr lvl="1"/>
             <a:r>
-              <a:rPr lang="en-US"/>
+              <a:rPr lang="en-US" smtClean="0"/>
               <a:t>Second level</a:t>
             </a:r>
           </a:p>
           <a:p>
             <a:pPr lvl="2"/>
             <a:r>
-              <a:rPr lang="en-US"/>
+              <a:rPr lang="en-US" smtClean="0"/>
               <a:t>Third level</a:t>
             </a:r>
           </a:p>
           <a:p>
             <a:pPr lvl="3"/>
             <a:r>
-              <a:rPr lang="en-US"/>
+              <a:rPr lang="en-US" smtClean="0"/>
               <a:t>Fourth level</a:t>
             </a:r>
           </a:p>
           <a:p>
             <a:pPr lvl="4"/>
             <a:r>
-              <a:rPr lang="en-US"/>
+              <a:rPr lang="en-US" smtClean="0"/>
               <a:t>Fifth level</a:t>
             </a:r>
+            <a:endParaRPr lang="en-US"/>
           </a:p>
         </p:txBody>
       </p:sp>
@@ -1295,37 +1290,38 @@
           <a:p>
             <a:pPr lvl="0"/>
             <a:r>
-              <a:rPr lang="en-US"/>
+              <a:rPr lang="en-US" smtClean="0"/>
               <a:t>Click to edit Master text styles</a:t>
             </a:r>
           </a:p>
           <a:p>
             <a:pPr lvl="1"/>
             <a:r>
-              <a:rPr lang="en-US"/>
+              <a:rPr lang="en-US" smtClean="0"/>
               <a:t>Second level</a:t>
             </a:r>
           </a:p>
           <a:p>
             <a:pPr lvl="2"/>
             <a:r>
-              <a:rPr lang="en-US"/>
+              <a:rPr lang="en-US" smtClean="0"/>
               <a:t>Third level</a:t>
             </a:r>
           </a:p>
           <a:p>
             <a:pPr lvl="3"/>
             <a:r>
-              <a:rPr lang="en-US"/>
+              <a:rPr lang="en-US" smtClean="0"/>
               <a:t>Fourth level</a:t>
             </a:r>
           </a:p>
           <a:p>
             <a:pPr lvl="4"/>
             <a:r>
-              <a:rPr lang="en-US"/>
+              <a:rPr lang="en-US" smtClean="0"/>
               <a:t>Fifth level</a:t>
             </a:r>
+            <a:endParaRPr lang="en-US"/>
           </a:p>
         </p:txBody>
       </p:sp>
@@ -1346,7 +1342,7 @@
           <a:p>
             <a:fld id="{5BCAD085-E8A6-8845-BD4E-CB4CCA059FC4}" type="datetimeFigureOut">
               <a:rPr lang="en-US" smtClean="0"/>
-              <a:t>8/17/26</a:t>
+              <a:t>1/27/13</a:t>
             </a:fld>
             <a:endParaRPr lang="en-US"/>
           </a:p>
@@ -1444,9 +1440,10 @@
           </a:lstStyle>
           <a:p>
             <a:r>
-              <a:rPr lang="en-US"/>
+              <a:rPr lang="en-US" smtClean="0"/>
               <a:t>Click to edit Master title style</a:t>
             </a:r>
+            <a:endParaRPr lang="en-US"/>
           </a:p>
         </p:txBody>
       </p:sp>
@@ -1509,7 +1506,7 @@
           <a:p>
             <a:pPr lvl="0"/>
             <a:r>
-              <a:rPr lang="en-US"/>
+              <a:rPr lang="en-US" smtClean="0"/>
               <a:t>Click to edit Master text styles</a:t>
             </a:r>
           </a:p>
@@ -1565,37 +1562,38 @@
           <a:p>
             <a:pPr lvl="0"/>
             <a:r>
-              <a:rPr lang="en-US"/>
+              <a:rPr lang="en-US" smtClean="0"/>
               <a:t>Click to edit Master text styles</a:t>
             </a:r>
           </a:p>
           <a:p>
             <a:pPr lvl="1"/>
             <a:r>
-              <a:rPr lang="en-US"/>
+              <a:rPr lang="en-US" smtClean="0"/>
               <a:t>Second level</a:t>
             </a:r>
           </a:p>
           <a:p>
             <a:pPr lvl="2"/>
             <a:r>
-              <a:rPr lang="en-US"/>
+              <a:rPr lang="en-US" smtClean="0"/>
               <a:t>Third level</a:t>
             </a:r>
           </a:p>
           <a:p>
             <a:pPr lvl="3"/>
             <a:r>
-              <a:rPr lang="en-US"/>
+              <a:rPr lang="en-US" smtClean="0"/>
               <a:t>Fourth level</a:t>
             </a:r>
           </a:p>
           <a:p>
             <a:pPr lvl="4"/>
             <a:r>
-              <a:rPr lang="en-US"/>
+              <a:rPr lang="en-US" smtClean="0"/>
               <a:t>Fifth level</a:t>
             </a:r>
+            <a:endParaRPr lang="en-US"/>
           </a:p>
         </p:txBody>
       </p:sp>
@@ -1658,7 +1656,7 @@
           <a:p>
             <a:pPr lvl="0"/>
             <a:r>
-              <a:rPr lang="en-US"/>
+              <a:rPr lang="en-US" smtClean="0"/>
               <a:t>Click to edit Master text styles</a:t>
             </a:r>
           </a:p>
@@ -1714,37 +1712,38 @@
           <a:p>
             <a:pPr lvl="0"/>
             <a:r>
-              <a:rPr lang="en-US"/>
+              <a:rPr lang="en-US" smtClean="0"/>
               <a:t>Click to edit Master text styles</a:t>
             </a:r>
           </a:p>
           <a:p>
             <a:pPr lvl="1"/>
             <a:r>
-              <a:rPr lang="en-US"/>
+              <a:rPr lang="en-US" smtClean="0"/>
               <a:t>Second level</a:t>
             </a:r>
           </a:p>
           <a:p>
             <a:pPr lvl="2"/>
             <a:r>
-              <a:rPr lang="en-US"/>
+              <a:rPr lang="en-US" smtClean="0"/>
               <a:t>Third level</a:t>
             </a:r>
           </a:p>
           <a:p>
             <a:pPr lvl="3"/>
             <a:r>
-              <a:rPr lang="en-US"/>
+              <a:rPr lang="en-US" smtClean="0"/>
               <a:t>Fourth level</a:t>
             </a:r>
           </a:p>
           <a:p>
             <a:pPr lvl="4"/>
             <a:r>
-              <a:rPr lang="en-US"/>
+              <a:rPr lang="en-US" smtClean="0"/>
               <a:t>Fifth level</a:t>
             </a:r>
+            <a:endParaRPr lang="en-US"/>
           </a:p>
         </p:txBody>
       </p:sp>
@@ -1765,7 +1764,7 @@
           <a:p>
             <a:fld id="{5BCAD085-E8A6-8845-BD4E-CB4CCA059FC4}" type="datetimeFigureOut">
               <a:rPr lang="en-US" smtClean="0"/>
-              <a:t>8/17/26</a:t>
+              <a:t>1/27/13</a:t>
             </a:fld>
             <a:endParaRPr lang="en-US"/>
           </a:p>
@@ -1859,9 +1858,10 @@
           <a:lstStyle/>
           <a:p>
             <a:r>
-              <a:rPr lang="en-US"/>
+              <a:rPr lang="en-US" smtClean="0"/>
               <a:t>Click to edit Master title style</a:t>
             </a:r>
+            <a:endParaRPr lang="en-US"/>
           </a:p>
         </p:txBody>
       </p:sp>
@@ -1882,7 +1882,7 @@
           <a:p>
             <a:fld id="{5BCAD085-E8A6-8845-BD4E-CB4CCA059FC4}" type="datetimeFigureOut">
               <a:rPr lang="en-US" smtClean="0"/>
-              <a:t>8/17/26</a:t>
+              <a:t>1/27/13</a:t>
             </a:fld>
             <a:endParaRPr lang="en-US"/>
           </a:p>
@@ -1977,7 +1977,7 @@
           <a:p>
             <a:fld id="{5BCAD085-E8A6-8845-BD4E-CB4CCA059FC4}" type="datetimeFigureOut">
               <a:rPr lang="en-US" smtClean="0"/>
-              <a:t>8/17/26</a:t>
+              <a:t>1/27/13</a:t>
             </a:fld>
             <a:endParaRPr lang="en-US"/>
           </a:p>
@@ -2080,9 +2080,10 @@
           </a:lstStyle>
           <a:p>
             <a:r>
-              <a:rPr lang="en-US"/>
+              <a:rPr lang="en-US" smtClean="0"/>
               <a:t>Click to edit Master title style</a:t>
             </a:r>
+            <a:endParaRPr lang="en-US"/>
           </a:p>
         </p:txBody>
       </p:sp>
@@ -2136,37 +2137,38 @@
           <a:p>
             <a:pPr lvl="0"/>
             <a:r>
-              <a:rPr lang="en-US"/>
+              <a:rPr lang="en-US" smtClean="0"/>
               <a:t>Click to edit Master text styles</a:t>
             </a:r>
           </a:p>
           <a:p>
             <a:pPr lvl="1"/>
             <a:r>
-              <a:rPr lang="en-US"/>
+              <a:rPr lang="en-US" smtClean="0"/>
               <a:t>Second level</a:t>
             </a:r>
           </a:p>
           <a:p>
             <a:pPr lvl="2"/>
             <a:r>
-              <a:rPr lang="en-US"/>
+              <a:rPr lang="en-US" smtClean="0"/>
               <a:t>Third level</a:t>
             </a:r>
           </a:p>
           <a:p>
             <a:pPr lvl="3"/>
             <a:r>
-              <a:rPr lang="en-US"/>
+              <a:rPr lang="en-US" smtClean="0"/>
               <a:t>Fourth level</a:t>
             </a:r>
           </a:p>
           <a:p>
             <a:pPr lvl="4"/>
             <a:r>
-              <a:rPr lang="en-US"/>
+              <a:rPr lang="en-US" smtClean="0"/>
               <a:t>Fifth level</a:t>
             </a:r>
+            <a:endParaRPr lang="en-US"/>
           </a:p>
         </p:txBody>
       </p:sp>
@@ -2229,7 +2231,7 @@
           <a:p>
             <a:pPr lvl="0"/>
             <a:r>
-              <a:rPr lang="en-US"/>
+              <a:rPr lang="en-US" smtClean="0"/>
               <a:t>Click to edit Master text styles</a:t>
             </a:r>
           </a:p>
@@ -2252,7 +2254,7 @@
           <a:p>
             <a:fld id="{5BCAD085-E8A6-8845-BD4E-CB4CCA059FC4}" type="datetimeFigureOut">
               <a:rPr lang="en-US" smtClean="0"/>
-              <a:t>8/17/26</a:t>
+              <a:t>1/27/13</a:t>
             </a:fld>
             <a:endParaRPr lang="en-US"/>
           </a:p>
@@ -2355,9 +2357,10 @@
           </a:lstStyle>
           <a:p>
             <a:r>
-              <a:rPr lang="en-US"/>
+              <a:rPr lang="en-US" smtClean="0"/>
               <a:t>Click to edit Master title style</a:t>
             </a:r>
+            <a:endParaRPr lang="en-US"/>
           </a:p>
         </p:txBody>
       </p:sp>
@@ -2481,7 +2484,7 @@
           <a:p>
             <a:pPr lvl="0"/>
             <a:r>
-              <a:rPr lang="en-US"/>
+              <a:rPr lang="en-US" smtClean="0"/>
               <a:t>Click to edit Master text styles</a:t>
             </a:r>
           </a:p>
@@ -2504,7 +2507,7 @@
           <a:p>
             <a:fld id="{5BCAD085-E8A6-8845-BD4E-CB4CCA059FC4}" type="datetimeFigureOut">
               <a:rPr lang="en-US" smtClean="0"/>
-              <a:t>8/17/26</a:t>
+              <a:t>1/27/13</a:t>
             </a:fld>
             <a:endParaRPr lang="en-US"/>
           </a:p>
@@ -2613,9 +2616,10 @@
           <a:lstStyle/>
           <a:p>
             <a:r>
-              <a:rPr lang="en-US"/>
+              <a:rPr lang="en-US" smtClean="0"/>
               <a:t>Click to edit Master title style</a:t>
             </a:r>
+            <a:endParaRPr lang="en-US"/>
           </a:p>
         </p:txBody>
       </p:sp>
@@ -2646,37 +2650,38 @@
           <a:p>
             <a:pPr lvl="0"/>
             <a:r>
-              <a:rPr lang="en-US"/>
+              <a:rPr lang="en-US" smtClean="0"/>
               <a:t>Click to edit Master text styles</a:t>
             </a:r>
           </a:p>
           <a:p>
             <a:pPr lvl="1"/>
             <a:r>
-              <a:rPr lang="en-US"/>
+              <a:rPr lang="en-US" smtClean="0"/>
               <a:t>Second level</a:t>
             </a:r>
           </a:p>
           <a:p>
             <a:pPr lvl="2"/>
             <a:r>
-              <a:rPr lang="en-US"/>
+              <a:rPr lang="en-US" smtClean="0"/>
               <a:t>Third level</a:t>
             </a:r>
           </a:p>
           <a:p>
             <a:pPr lvl="3"/>
             <a:r>
-              <a:rPr lang="en-US"/>
+              <a:rPr lang="en-US" smtClean="0"/>
               <a:t>Fourth level</a:t>
             </a:r>
           </a:p>
           <a:p>
             <a:pPr lvl="4"/>
             <a:r>
-              <a:rPr lang="en-US"/>
+              <a:rPr lang="en-US" smtClean="0"/>
               <a:t>Fifth level</a:t>
             </a:r>
+            <a:endParaRPr lang="en-US"/>
           </a:p>
         </p:txBody>
       </p:sp>
@@ -2715,7 +2720,7 @@
           <a:p>
             <a:fld id="{5BCAD085-E8A6-8845-BD4E-CB4CCA059FC4}" type="datetimeFigureOut">
               <a:rPr lang="en-US" smtClean="0"/>
-              <a:t>8/17/26</a:t>
+              <a:t>1/27/13</a:t>
             </a:fld>
             <a:endParaRPr lang="en-US"/>
           </a:p>
@@ -3074,7 +3079,7 @@
 </file>
 
 <file path=ppt/slides/slide1.xml><?xml version="1.0" encoding="utf-8"?>
-<p:sld xmlns:a="http://schemas.openxmlformats.org/drawingml/2006/main" xmlns:r="http://schemas.openxmlformats.org/officeDocument/2006/relationships" xmlns:p="http://schemas.openxmlformats.org/presentationml/2006/main">
+<p:sld xmlns:a="http://schemas.openxmlformats.org/drawingml/2006/main" xmlns:p="http://schemas.openxmlformats.org/presentationml/2006/main" xmlns:r="http://schemas.openxmlformats.org/officeDocument/2006/relationships">
   <p:cSld>
     <p:spTree>
       <p:nvGrpSpPr>
@@ -3082,14 +3087,7 @@
         <p:cNvGrpSpPr/>
         <p:nvPr/>
       </p:nvGrpSpPr>
-      <p:grpSpPr>
-        <a:xfrm>
-          <a:off x="0" y="0"/>
-          <a:ext cx="0" cy="0"/>
-          <a:chOff x="0" y="0"/>
-          <a:chExt cx="0" cy="0"/>
-        </a:xfrm>
-      </p:grpSpPr>
+      <p:grpSpPr/>
       <p:sp>
         <p:nvSpPr>
           <p:cNvPr id="2" name="TextBox 1"/>
@@ -3121,108 +3119,37 @@
           </a:p>
         </p:txBody>
       </p:sp>
-      <mc:AlternateContent xmlns:mc="http://schemas.openxmlformats.org/markup-compatibility/2006" xmlns:a14="http://schemas.microsoft.com/office/drawing/2010/main">
-        <mc:Choice Requires="a14">
-          <p:sp>
-            <p:nvSpPr>
-              <p:cNvPr id="3" name="TextBox 2"/>
-              <p:cNvSpPr txBox="1"/>
-              <p:nvPr/>
-            </p:nvSpPr>
-            <p:spPr>
-              <a:xfrm>
-                <a:off x="384048" y="713232"/>
-                <a:ext cx="4607352" cy="246221"/>
-              </a:xfrm>
-              <a:prstGeom prst="rect">
-                <a:avLst/>
-              </a:prstGeom>
-              <a:noFill/>
-            </p:spPr>
-            <p:txBody>
-              <a:bodyPr wrap="none">
-                <a:spAutoFit/>
-              </a:bodyPr>
-              <a:lstStyle/>
-              <a:p>
-                <a:r>
-                  <a:rPr sz="1000" b="0" i="0" baseline="0" dirty="0">
-                    <a:latin typeface="Calibri"/>
-                  </a:rPr>
-                  <a:t>PD22 · ESPN box coverage · 2011–2021 · 2013→2014 raw +</a:t>
-                </a:r>
-                <a14:m>
-                  <m:oMath xmlns:m="http://schemas.openxmlformats.org/officeDocument/2006/math">
-                    <m:r>
-                      <a:rPr lang="en-US" sz="1000" b="0" i="0" baseline="0" dirty="0" smtClean="0">
-                        <a:latin typeface="Cambria Math" panose="02040503050406030204" pitchFamily="18" charset="0"/>
-                      </a:rPr>
-                      <m:t>83.3%</m:t>
-                    </m:r>
-                  </m:oMath>
-                </a14:m>
-                <a:r>
-                  <a:rPr sz="1000" b="0" i="0" baseline="0" dirty="0">
-                    <a:latin typeface="Calibri"/>
-                  </a:rPr>
-                  <a:t> · min-20 +</a:t>
-                </a:r>
-                <a14:m>
-                  <m:oMath xmlns:m="http://schemas.openxmlformats.org/officeDocument/2006/math">
-                    <m:r>
-                      <a:rPr lang="en-US" sz="1000" b="0" i="0" baseline="0" dirty="0" smtClean="0">
-                        <a:latin typeface="Cambria Math" panose="02040503050406030204" pitchFamily="18" charset="0"/>
-                      </a:rPr>
-                      <m:t>2.7%</m:t>
-                    </m:r>
-                  </m:oMath>
-                </a14:m>
-                <a:endParaRPr sz="1000" b="0" i="0" baseline="0" dirty="0">
-                  <a:latin typeface="Calibri"/>
-                </a:endParaRPr>
-              </a:p>
-            </p:txBody>
-          </p:sp>
-        </mc:Choice>
-        <mc:Fallback xmlns="">
-          <p:sp>
-            <p:nvSpPr>
-              <p:cNvPr id="3" name="TextBox 2"/>
-              <p:cNvSpPr txBox="1">
-                <a:spLocks noRot="1" noChangeAspect="1" noMove="1" noResize="1" noEditPoints="1" noAdjustHandles="1" noChangeArrowheads="1" noChangeShapeType="1" noTextEdit="1"/>
-              </p:cNvSpPr>
-              <p:nvPr/>
-            </p:nvSpPr>
-            <p:spPr>
-              <a:xfrm>
-                <a:off x="384048" y="713232"/>
-                <a:ext cx="4607352" cy="246221"/>
-              </a:xfrm>
-              <a:prstGeom prst="rect">
-                <a:avLst/>
-              </a:prstGeom>
-              <a:blipFill>
-                <a:blip r:embed="rId2"/>
-                <a:stretch>
-                  <a:fillRect b="-10000"/>
-                </a:stretch>
-              </a:blipFill>
-            </p:spPr>
-            <p:txBody>
-              <a:bodyPr/>
-              <a:lstStyle/>
-              <a:p>
-                <a:r>
-                  <a:rPr lang="en-US">
-                    <a:noFill/>
-                  </a:rPr>
-                  <a:t> </a:t>
-                </a:r>
-              </a:p>
-            </p:txBody>
-          </p:sp>
-        </mc:Fallback>
-      </mc:AlternateContent>
+      <p:sp>
+        <p:nvSpPr>
+          <p:cNvPr id="3" name="TextBox 2"/>
+          <p:cNvSpPr txBox="1"/>
+          <p:nvPr/>
+        </p:nvSpPr>
+        <p:spPr>
+          <a:xfrm>
+            <a:off x="384048" y="713232"/>
+            <a:ext cx="11423599" cy="246888"/>
+          </a:xfrm>
+          <a:prstGeom prst="rect">
+            <a:avLst/>
+          </a:prstGeom>
+          <a:noFill/>
+        </p:spPr>
+        <p:txBody>
+          <a:bodyPr wrap="none">
+            <a:spAutoFit/>
+          </a:bodyPr>
+          <a:lstStyle/>
+          <a:p>
+            <a:r>
+              <a:rPr sz="1000" b="0" i="0" baseline="0">
+                <a:latin typeface="Calibri"/>
+              </a:rPr>
+              <a:t>PD22 · ESPN box coverage · 2011–2021 · 2013→2014 raw +$83.3\%$ · min-20 +$2.7\%$</a:t>
+            </a:r>
+          </a:p>
+        </p:txBody>
+      </p:sp>
       <p:pic>
         <p:nvPicPr>
           <p:cNvPr id="4" name="Picture 3" descr="PD22_espn_coverage_by_season_2011_2021.png"/>
@@ -3232,7 +3159,7 @@
           <p:nvPr/>
         </p:nvPicPr>
         <p:blipFill>
-          <a:blip r:embed="rId3"/>
+          <a:blip r:embed="rId2"/>
           <a:stretch>
             <a:fillRect/>
           </a:stretch>
@@ -3247,650 +3174,221 @@
           </a:prstGeom>
         </p:spPr>
       </p:pic>
-      <mc:AlternateContent xmlns:mc="http://schemas.openxmlformats.org/markup-compatibility/2006" xmlns:a14="http://schemas.microsoft.com/office/drawing/2010/main">
-        <mc:Choice Requires="a14">
-          <p:sp>
-            <p:nvSpPr>
-              <p:cNvPr id="5" name="TextBox 4"/>
-              <p:cNvSpPr txBox="1"/>
-              <p:nvPr/>
-            </p:nvSpPr>
-            <p:spPr>
-              <a:xfrm>
-                <a:off x="384048" y="5080635"/>
-                <a:ext cx="11423599" cy="1323439"/>
-              </a:xfrm>
-              <a:prstGeom prst="rect">
-                <a:avLst/>
-              </a:prstGeom>
-              <a:noFill/>
-            </p:spPr>
-            <p:txBody>
-              <a:bodyPr wrap="square">
-                <a:spAutoFit/>
-              </a:bodyPr>
-              <a:lstStyle/>
-              <a:p>
-                <a:pPr>
-                  <a:buChar char="•"/>
-                </a:pPr>
-                <a:r>
-                  <a:rPr sz="1000" b="0" i="0" baseline="0" dirty="0">
-                    <a:latin typeface="Calibri"/>
-                  </a:rPr>
-                  <a:t>  PD22 backup (SCOUT Aug 2026): frozen </a:t>
-                </a:r>
-                <a14:m>
-                  <m:oMath xmlns:m="http://schemas.openxmlformats.org/officeDocument/2006/math">
-                    <m:box>
-                      <m:boxPr>
-                        <m:ctrlPr>
-                          <a:rPr lang="en-US" sz="1000" b="0" i="0" baseline="0" dirty="0">
-                            <a:latin typeface="Cambria Math" panose="02040503050406030204" pitchFamily="18" charset="0"/>
-                          </a:rPr>
-                        </m:ctrlPr>
-                      </m:boxPr>
-                      <m:e>
-                        <m:r>
-                          <a:rPr lang="en-US" sz="1000" b="0" i="0" baseline="0" dirty="0">
-                            <a:latin typeface="Cambria Math" panose="02040503050406030204" pitchFamily="18" charset="0"/>
-                          </a:rPr>
-                          <m:t>𝚖𝚋𝚋</m:t>
-                        </m:r>
-                        <m:r>
-                          <a:rPr lang="en-US" sz="1000" b="0" i="0" baseline="0" dirty="0">
-                            <a:latin typeface="Cambria Math" panose="02040503050406030204" pitchFamily="18" charset="0"/>
-                          </a:rPr>
-                          <m:t>_</m:t>
-                        </m:r>
-                        <m:r>
-                          <a:rPr lang="en-US" sz="1000" b="0" i="0" baseline="0" dirty="0">
-                            <a:latin typeface="Cambria Math" panose="02040503050406030204" pitchFamily="18" charset="0"/>
-                          </a:rPr>
-                          <m:t>𝚍𝚏</m:t>
-                        </m:r>
-                        <m:r>
-                          <a:rPr lang="en-US" sz="1000" b="0" i="0" baseline="0" dirty="0">
-                            <a:latin typeface="Cambria Math" panose="02040503050406030204" pitchFamily="18" charset="0"/>
-                          </a:rPr>
-                          <m:t>_</m:t>
-                        </m:r>
-                        <m:r>
-                          <a:rPr lang="en-US" sz="1000" b="0" i="0" baseline="0" dirty="0">
-                            <a:latin typeface="Cambria Math" panose="02040503050406030204" pitchFamily="18" charset="0"/>
-                          </a:rPr>
-                          <m:t>𝚙𝚕𝚊𝚢𝚎𝚛</m:t>
-                        </m:r>
-                        <m:r>
-                          <a:rPr lang="en-US" sz="1000" b="0" i="0" baseline="0" dirty="0">
-                            <a:latin typeface="Cambria Math" panose="02040503050406030204" pitchFamily="18" charset="0"/>
-                          </a:rPr>
-                          <m:t>_</m:t>
-                        </m:r>
-                        <m:r>
-                          <a:rPr lang="en-US" sz="1000" b="0" i="0" baseline="0" dirty="0">
-                            <a:latin typeface="Cambria Math" panose="02040503050406030204" pitchFamily="18" charset="0"/>
-                          </a:rPr>
-                          <m:t>𝚋𝚘𝚡</m:t>
-                        </m:r>
-                        <m:r>
-                          <a:rPr lang="en-US" sz="1000" b="0" i="0" baseline="0" dirty="0">
-                            <a:latin typeface="Cambria Math" panose="02040503050406030204" pitchFamily="18" charset="0"/>
-                          </a:rPr>
-                          <m:t>.</m:t>
-                        </m:r>
-                        <m:r>
-                          <a:rPr lang="en-US" sz="1000" b="0" i="0" baseline="0" dirty="0">
-                            <a:latin typeface="Cambria Math" panose="02040503050406030204" pitchFamily="18" charset="0"/>
-                          </a:rPr>
-                          <m:t>𝚌𝚜𝚟</m:t>
-                        </m:r>
-                      </m:e>
-                    </m:box>
-                  </m:oMath>
-                </a14:m>
-                <a:r>
-                  <a:rPr sz="1000" b="0" i="0" baseline="0" dirty="0">
-                    <a:latin typeface="Calibri"/>
-                  </a:rPr>
-                  <a:t> — season coverage for </a:t>
-                </a:r>
-                <a14:m>
-                  <m:oMath xmlns:m="http://schemas.openxmlformats.org/officeDocument/2006/math">
-                    <m:r>
-                      <a:rPr lang="en-US" sz="1000" b="0" i="0" baseline="0" dirty="0" smtClean="0">
-                        <a:latin typeface="Cambria Math" panose="02040503050406030204" pitchFamily="18" charset="0"/>
-                      </a:rPr>
-                      <m:t>𝜌</m:t>
-                    </m:r>
-                  </m:oMath>
-                </a14:m>
-                <a:r>
-                  <a:rPr sz="1000" b="0" i="0" baseline="0" dirty="0">
-                    <a:latin typeface="Calibri"/>
-                  </a:rPr>
-                  <a:t> timeseries jump.</a:t>
-                </a:r>
-              </a:p>
-              <a:p>
-                <a:pPr>
-                  <a:buChar char="•"/>
-                </a:pPr>
-                <a:r>
-                  <a:rPr sz="1000" b="0" i="0" baseline="0" dirty="0">
-                    <a:latin typeface="Calibri"/>
-                  </a:rPr>
-                  <a:t>  Source: distinct player-season rows aggregated from ESPN box (2011–2021); CSV not rewritten on disk.</a:t>
-                </a:r>
-              </a:p>
-              <a:p>
-                <a:pPr>
-                  <a:buChar char="•"/>
-                </a:pPr>
-                <a:r>
-                  <a:rPr sz="1000" b="0" i="0" baseline="0" dirty="0">
-                    <a:latin typeface="Calibri"/>
-                  </a:rPr>
-                  <a:t>  2013→2014 raw player-seasons: </a:t>
-                </a:r>
-                <a14:m>
-                  <m:oMath xmlns:m="http://schemas.openxmlformats.org/officeDocument/2006/math">
-                    <m:r>
-                      <a:rPr lang="en-US" sz="1000" b="0" i="0" baseline="0" dirty="0" smtClean="0">
-                        <a:latin typeface="Cambria Math" panose="02040503050406030204" pitchFamily="18" charset="0"/>
-                      </a:rPr>
-                      <m:t>5,801→10,633</m:t>
-                    </m:r>
-                  </m:oMath>
-                </a14:m>
-                <a:r>
-                  <a:rPr sz="1000" b="0" i="0" baseline="0" dirty="0">
-                    <a:latin typeface="Calibri"/>
-                  </a:rPr>
-                  <a:t> (</a:t>
-                </a:r>
-                <a14:m>
-                  <m:oMath xmlns:m="http://schemas.openxmlformats.org/officeDocument/2006/math">
-                    <m:r>
-                      <a:rPr lang="en-US" sz="1000" b="0" i="0" baseline="0" dirty="0" smtClean="0">
-                        <a:latin typeface="Cambria Math" panose="02040503050406030204" pitchFamily="18" charset="0"/>
-                      </a:rPr>
-                      <m:t>83.3%</m:t>
-                    </m:r>
-                  </m:oMath>
-                </a14:m>
-                <a:r>
-                  <a:rPr sz="1000" b="0" i="0" baseline="0" dirty="0">
-                    <a:latin typeface="Calibri"/>
-                  </a:rPr>
-                  <a:t>); games </a:t>
-                </a:r>
-                <a14:m>
-                  <m:oMath xmlns:m="http://schemas.openxmlformats.org/officeDocument/2006/math">
-                    <m:r>
-                      <a:rPr lang="en-US" sz="1000" b="0" i="0" baseline="0" dirty="0" smtClean="0">
-                        <a:latin typeface="Cambria Math" panose="02040503050406030204" pitchFamily="18" charset="0"/>
-                      </a:rPr>
-                      <m:t>3.4%</m:t>
-                    </m:r>
-                  </m:oMath>
-                </a14:m>
-                <a:r>
-                  <a:rPr sz="1000" b="0" i="0" baseline="0" dirty="0">
-                    <a:latin typeface="Calibri"/>
-                  </a:rPr>
-                  <a:t> only.</a:t>
-                </a:r>
-              </a:p>
-              <a:p>
-                <a:pPr>
-                  <a:buChar char="•"/>
-                </a:pPr>
-                <a:r>
-                  <a:rPr sz="1000" b="0" i="0" baseline="0" dirty="0">
-                    <a:latin typeface="Calibri"/>
-                  </a:rPr>
-                  <a:t>  Roster depth: median players/team-season </a:t>
-                </a:r>
-                <a14:m>
-                  <m:oMath xmlns:m="http://schemas.openxmlformats.org/officeDocument/2006/math">
-                    <m:r>
-                      <a:rPr lang="en-US" sz="1000" b="0" i="0" baseline="0" dirty="0" smtClean="0">
-                        <a:latin typeface="Cambria Math" panose="02040503050406030204" pitchFamily="18" charset="0"/>
-                      </a:rPr>
-                      <m:t>23.1%</m:t>
-                    </m:r>
-                  </m:oMath>
-                </a14:m>
-                <a:r>
-                  <a:rPr sz="1000" b="0" i="0" baseline="0" dirty="0">
-                    <a:latin typeface="Calibri"/>
-                  </a:rPr>
-                  <a:t>; mean box rows/game/team </a:t>
-                </a:r>
-                <a14:m>
-                  <m:oMath xmlns:m="http://schemas.openxmlformats.org/officeDocument/2006/math">
-                    <m:r>
-                      <a:rPr lang="en-US" sz="1000" b="0" i="0" baseline="0" dirty="0" smtClean="0">
-                        <a:latin typeface="Cambria Math" panose="02040503050406030204" pitchFamily="18" charset="0"/>
-                      </a:rPr>
-                      <m:t>15.9%</m:t>
-                    </m:r>
-                  </m:oMath>
-                </a14:m>
-                <a:r>
-                  <a:rPr sz="1000" b="0" i="0" baseline="0" dirty="0">
-                    <a:latin typeface="Calibri"/>
-                  </a:rPr>
-                  <a:t> — ESPN lists more bench lines from 2014.</a:t>
-                </a:r>
-              </a:p>
-              <a:p>
-                <a:pPr>
-                  <a:buChar char="•"/>
-                </a:pPr>
-                <a:r>
-                  <a:rPr sz="1000" b="0" i="0" baseline="0" dirty="0">
-                    <a:latin typeface="Calibri"/>
-                  </a:rPr>
-                  <a:t>  Overlap teams only (</a:t>
-                </a:r>
-                <a14:m>
-                  <m:oMath xmlns:m="http://schemas.openxmlformats.org/officeDocument/2006/math">
-                    <m:r>
-                      <a:rPr lang="en-US" sz="1000" b="0" i="0" baseline="0" dirty="0" smtClean="0">
-                        <a:latin typeface="Cambria Math" panose="02040503050406030204" pitchFamily="18" charset="0"/>
-                      </a:rPr>
-                      <m:t>464</m:t>
-                    </m:r>
-                  </m:oMath>
-                </a14:m>
-                <a:r>
-                  <a:rPr sz="1000" b="0" i="0" baseline="0" dirty="0">
-                    <a:latin typeface="Calibri"/>
-                  </a:rPr>
-                  <a:t> schools): player-seasons </a:t>
-                </a:r>
-                <a14:m>
-                  <m:oMath xmlns:m="http://schemas.openxmlformats.org/officeDocument/2006/math">
-                    <m:r>
-                      <a:rPr lang="en-US" sz="1000" b="0" i="0" baseline="0" dirty="0" smtClean="0">
-                        <a:latin typeface="Cambria Math" panose="02040503050406030204" pitchFamily="18" charset="0"/>
-                      </a:rPr>
-                      <m:t>5,388→7,783</m:t>
-                    </m:r>
-                  </m:oMath>
-                </a14:m>
-                <a:r>
-                  <a:rPr sz="1000" b="0" i="0" baseline="0" dirty="0">
-                    <a:latin typeface="Calibri"/>
-                  </a:rPr>
-                  <a:t> (</a:t>
-                </a:r>
-                <a14:m>
-                  <m:oMath xmlns:m="http://schemas.openxmlformats.org/officeDocument/2006/math">
-                    <m:r>
-                      <a:rPr lang="en-US" sz="1000" b="0" i="0" baseline="0" dirty="0" smtClean="0">
-                        <a:latin typeface="Cambria Math" panose="02040503050406030204" pitchFamily="18" charset="0"/>
-                      </a:rPr>
-                      <m:t>+44%</m:t>
-                    </m:r>
-                  </m:oMath>
-                </a14:m>
-                <a:r>
-                  <a:rPr sz="1000" b="0" i="0" baseline="0" dirty="0">
-                    <a:latin typeface="Calibri"/>
-                  </a:rPr>
-                  <a:t> on same </a:t>
-                </a:r>
-                <a14:m>
-                  <m:oMath xmlns:m="http://schemas.openxmlformats.org/officeDocument/2006/math">
-                    <m:r>
-                      <a:rPr lang="en-US" sz="1000" b="0" i="0" baseline="0" dirty="0" smtClean="0">
-                        <a:latin typeface="Cambria Math" panose="02040503050406030204" pitchFamily="18" charset="0"/>
-                      </a:rPr>
-                      <m:t>𝑡𝑒𝑎𝑚</m:t>
-                    </m:r>
-                    <m:r>
-                      <a:rPr lang="en-US" sz="1000" b="0" i="0" baseline="0" dirty="0" smtClean="0">
-                        <a:latin typeface="Cambria Math" panose="02040503050406030204" pitchFamily="18" charset="0"/>
-                      </a:rPr>
-                      <m:t>_</m:t>
-                    </m:r>
-                    <m:r>
-                      <a:rPr lang="en-US" sz="1000" b="0" i="0" baseline="0" dirty="0" smtClean="0">
-                        <a:latin typeface="Cambria Math" panose="02040503050406030204" pitchFamily="18" charset="0"/>
-                      </a:rPr>
-                      <m:t>𝑖𝑑𝑠</m:t>
-                    </m:r>
-                  </m:oMath>
-                </a14:m>
-                <a:r>
-                  <a:rPr sz="1000" b="0" i="0" baseline="0" dirty="0">
-                    <a:latin typeface="Calibri"/>
-                  </a:rPr>
-                  <a:t>).</a:t>
-                </a:r>
-              </a:p>
-              <a:p>
-                <a:pPr>
-                  <a:buChar char="•"/>
-                </a:pPr>
-                <a:r>
-                  <a:rPr sz="1000" b="0" i="0" baseline="0" dirty="0">
-                    <a:latin typeface="Calibri"/>
-                  </a:rPr>
-                  <a:t>  Hero panel (box QC + min </a:t>
-                </a:r>
-                <a14:m>
-                  <m:oMath xmlns:m="http://schemas.openxmlformats.org/officeDocument/2006/math">
-                    <m:r>
-                      <a:rPr lang="en-US" sz="1000" b="0" i="0" baseline="0" dirty="0" smtClean="0">
-                        <a:latin typeface="Cambria Math" panose="02040503050406030204" pitchFamily="18" charset="0"/>
-                      </a:rPr>
-                      <m:t>≥20</m:t>
-                    </m:r>
-                  </m:oMath>
-                </a14:m>
-                <a:r>
-                  <a:rPr sz="1000" b="0" i="0" baseline="0" dirty="0">
-                    <a:latin typeface="Calibri"/>
-                  </a:rPr>
-                  <a:t>): </a:t>
-                </a:r>
-                <a14:m>
-                  <m:oMath xmlns:m="http://schemas.openxmlformats.org/officeDocument/2006/math">
-                    <m:r>
-                      <a:rPr lang="en-US" sz="1000" b="0" i="0" baseline="0" dirty="0" smtClean="0">
-                        <a:latin typeface="Cambria Math" panose="02040503050406030204" pitchFamily="18" charset="0"/>
-                      </a:rPr>
-                      <m:t>4,135→4,248</m:t>
-                    </m:r>
-                  </m:oMath>
-                </a14:m>
-                <a:r>
-                  <a:rPr sz="1000" b="0" i="0" baseline="0" dirty="0">
-                    <a:latin typeface="Calibri"/>
-                  </a:rPr>
-                  <a:t> (</a:t>
-                </a:r>
-                <a14:m>
-                  <m:oMath xmlns:m="http://schemas.openxmlformats.org/officeDocument/2006/math">
-                    <m:r>
-                      <a:rPr lang="en-US" sz="1000" b="0" i="0" baseline="0" dirty="0" smtClean="0">
-                        <a:latin typeface="Cambria Math" panose="02040503050406030204" pitchFamily="18" charset="0"/>
-                      </a:rPr>
-                      <m:t>2.7%</m:t>
-                    </m:r>
-                  </m:oMath>
-                </a14:m>
-                <a:r>
-                  <a:rPr sz="1000" b="0" i="0" baseline="0" dirty="0">
-                    <a:latin typeface="Calibri"/>
-                  </a:rPr>
-                  <a:t>).</a:t>
-                </a:r>
-              </a:p>
-              <a:p>
-                <a:pPr>
-                  <a:buChar char="•"/>
-                </a:pPr>
-                <a:r>
-                  <a:rPr sz="1000" b="0" i="0" baseline="0" dirty="0">
-                    <a:latin typeface="Calibri"/>
-                  </a:rPr>
-                  <a:t>  Left: raw aggregate jumps at 2014; orange min-20 line flat — use for PD21 </a:t>
-                </a:r>
-                <a14:m>
-                  <m:oMath xmlns:m="http://schemas.openxmlformats.org/officeDocument/2006/math">
-                    <m:r>
-                      <a:rPr lang="en-US" sz="1000" b="0" i="0" baseline="0" dirty="0" smtClean="0">
-                        <a:latin typeface="Cambria Math" panose="02040503050406030204" pitchFamily="18" charset="0"/>
-                      </a:rPr>
-                      <m:t>𝜌</m:t>
-                    </m:r>
-                  </m:oMath>
-                </a14:m>
-                <a:r>
-                  <a:rPr sz="1000" b="0" i="0" baseline="0" dirty="0">
-                    <a:latin typeface="Calibri"/>
-                  </a:rPr>
-                  <a:t> calibration, not </a:t>
-                </a:r>
-                <a14:m>
-                  <m:oMath xmlns:m="http://schemas.openxmlformats.org/officeDocument/2006/math">
-                    <m:r>
-                      <a:rPr lang="en-US" sz="1000" b="0" i="0" baseline="0" dirty="0" smtClean="0">
-                        <a:latin typeface="Cambria Math" panose="02040503050406030204" pitchFamily="18" charset="0"/>
-                      </a:rPr>
-                      <m:t>𝑝𝑝𝑚</m:t>
-                    </m:r>
-                    <m:r>
-                      <a:rPr lang="en-US" sz="1000" b="0" i="0" baseline="0" dirty="0" smtClean="0">
-                        <a:latin typeface="Cambria Math" panose="02040503050406030204" pitchFamily="18" charset="0"/>
-                      </a:rPr>
-                      <m:t>0</m:t>
-                    </m:r>
-                    <m:r>
-                      <a:rPr lang="en-US" sz="1000" b="0" i="0" baseline="0" dirty="0" smtClean="0">
-                        <a:latin typeface="Cambria Math" panose="02040503050406030204" pitchFamily="18" charset="0"/>
-                      </a:rPr>
-                      <m:t>𝑙𝑡</m:t>
-                    </m:r>
-                    <m:r>
-                      <a:rPr lang="en-US" sz="1000" b="0" i="0" baseline="0" dirty="0" smtClean="0">
-                        <a:latin typeface="Cambria Math" panose="02040503050406030204" pitchFamily="18" charset="0"/>
-                      </a:rPr>
-                      <m:t>20</m:t>
-                    </m:r>
-                  </m:oMath>
-                </a14:m>
-                <a:r>
-                  <a:rPr sz="1000" b="0" i="0" baseline="0" dirty="0">
-                    <a:latin typeface="Calibri"/>
-                  </a:rPr>
-                  <a:t>.</a:t>
-                </a:r>
-              </a:p>
-              <a:p>
-                <a:pPr>
-                  <a:buChar char="•"/>
-                </a:pPr>
-                <a:r>
-                  <a:rPr sz="1000" b="0" i="0" baseline="0" dirty="0">
-                    <a:latin typeface="Calibri"/>
-                  </a:rPr>
-                  <a:t>  Right: median roster size and rows/game/team — SCOUT verify against ESPN API sample games 2013 vs 2014.</a:t>
-                </a:r>
-              </a:p>
-            </p:txBody>
-          </p:sp>
-        </mc:Choice>
-        <mc:Fallback xmlns="">
-          <p:sp>
-            <p:nvSpPr>
-              <p:cNvPr id="5" name="TextBox 4"/>
-              <p:cNvSpPr txBox="1">
-                <a:spLocks noRot="1" noChangeAspect="1" noMove="1" noResize="1" noEditPoints="1" noAdjustHandles="1" noChangeArrowheads="1" noChangeShapeType="1" noTextEdit="1"/>
-              </p:cNvSpPr>
-              <p:nvPr/>
-            </p:nvSpPr>
-            <p:spPr>
-              <a:xfrm>
-                <a:off x="384048" y="5080635"/>
-                <a:ext cx="11423599" cy="1323439"/>
-              </a:xfrm>
-              <a:prstGeom prst="rect">
-                <a:avLst/>
-              </a:prstGeom>
-              <a:blipFill>
-                <a:blip r:embed="rId4"/>
-                <a:stretch>
-                  <a:fillRect b="-943"/>
-                </a:stretch>
-              </a:blipFill>
-            </p:spPr>
-            <p:txBody>
-              <a:bodyPr/>
-              <a:lstStyle/>
-              <a:p>
-                <a:r>
-                  <a:rPr lang="en-US">
-                    <a:noFill/>
-                  </a:rPr>
-                  <a:t> </a:t>
-                </a:r>
-              </a:p>
-            </p:txBody>
-          </p:sp>
-        </mc:Fallback>
-      </mc:AlternateContent>
-      <mc:AlternateContent xmlns:mc="http://schemas.openxmlformats.org/markup-compatibility/2006" xmlns:a14="http://schemas.microsoft.com/office/drawing/2010/main">
-        <mc:Choice Requires="a14">
-          <p:sp>
-            <p:nvSpPr>
-              <p:cNvPr id="6" name="TextBox 5"/>
-              <p:cNvSpPr txBox="1"/>
-              <p:nvPr/>
-            </p:nvSpPr>
-            <p:spPr>
-              <a:xfrm>
-                <a:off x="384048" y="6324219"/>
-                <a:ext cx="11423599" cy="261610"/>
-              </a:xfrm>
-              <a:prstGeom prst="rect">
-                <a:avLst/>
-              </a:prstGeom>
-              <a:noFill/>
-            </p:spPr>
-            <p:txBody>
-              <a:bodyPr wrap="square">
-                <a:spAutoFit/>
-              </a:bodyPr>
-              <a:lstStyle/>
-              <a:p>
-                <a:pPr algn="l"/>
-                <a:r>
-                  <a:rPr sz="1100" b="1" i="0" baseline="0" dirty="0">
-                    <a:latin typeface="Calibri"/>
-                  </a:rPr>
-                  <a:t>Claim (PD22 backup): 2013→2014 jump in raw player-season counts is ESPN box </a:t>
-                </a:r>
-                <a:r>
-                  <a:rPr sz="1100" b="1" i="1" baseline="0" dirty="0">
-                    <a:latin typeface="Calibri"/>
-                  </a:rPr>
-                  <a:t>depth</a:t>
-                </a:r>
-                <a:r>
-                  <a:rPr lang="en-US" sz="1100" b="1" i="0" baseline="0" dirty="0">
-                    <a:latin typeface="Calibri"/>
-                  </a:rPr>
-                  <a:t> </a:t>
-                </a:r>
-                <a:r>
-                  <a:rPr sz="1100" b="1" i="0" baseline="0" dirty="0">
-                    <a:latin typeface="Calibri"/>
-                  </a:rPr>
-                  <a:t>(more players listed per game), not doubled games — hero min-20 panel is longitudinal-safe for </a:t>
-                </a:r>
-                <a14:m>
-                  <m:oMath xmlns:m="http://schemas.openxmlformats.org/officeDocument/2006/math">
-                    <m:r>
-                      <a:rPr lang="en-US" sz="1100" b="1" i="0" baseline="0" dirty="0" smtClean="0">
-                        <a:latin typeface="Cambria Math" panose="02040503050406030204" pitchFamily="18" charset="0"/>
-                      </a:rPr>
-                      <m:t>𝜌</m:t>
-                    </m:r>
-                  </m:oMath>
-                </a14:m>
-                <a:r>
-                  <a:rPr sz="1100" b="1" i="0" baseline="0" dirty="0">
-                    <a:latin typeface="Calibri"/>
-                  </a:rPr>
-                  <a:t> / </a:t>
-                </a:r>
-                <a14:m>
-                  <m:oMath xmlns:m="http://schemas.openxmlformats.org/officeDocument/2006/math">
-                    <m:sSub>
-                      <m:sSubPr>
-                        <m:ctrlPr>
-                          <a:rPr lang="en-US" sz="1100" b="1" i="0" baseline="0" dirty="0">
-                            <a:latin typeface="Cambria Math" panose="02040503050406030204" pitchFamily="18" charset="0"/>
-                          </a:rPr>
-                        </m:ctrlPr>
-                      </m:sSubPr>
-                      <m:e>
-                        <m:r>
-                          <a:rPr lang="en-US" sz="1100" b="1" i="0" baseline="0" dirty="0">
-                            <a:latin typeface="Cambria Math" panose="02040503050406030204" pitchFamily="18" charset="0"/>
-                          </a:rPr>
-                          <m:t>𝐻</m:t>
-                        </m:r>
-                      </m:e>
-                      <m:sub>
-                        <m:r>
-                          <m:rPr>
-                            <m:sty m:val="p"/>
-                          </m:rPr>
-                          <a:rPr lang="en-US" sz="1100" b="1" i="0" baseline="0" dirty="0">
-                            <a:latin typeface="Cambria Math" panose="02040503050406030204" pitchFamily="18" charset="0"/>
-                          </a:rPr>
-                          <m:t>sort</m:t>
-                        </m:r>
-                      </m:sub>
-                    </m:sSub>
-                  </m:oMath>
-                </a14:m>
-                <a:r>
-                  <a:rPr sz="1100" b="1" i="0" baseline="0" dirty="0">
-                    <a:latin typeface="Calibri"/>
-                  </a:rPr>
-                  <a:t>.</a:t>
-                </a:r>
-              </a:p>
-            </p:txBody>
-          </p:sp>
-        </mc:Choice>
-        <mc:Fallback xmlns="">
-          <p:sp>
-            <p:nvSpPr>
-              <p:cNvPr id="6" name="TextBox 5"/>
-              <p:cNvSpPr txBox="1">
-                <a:spLocks noRot="1" noChangeAspect="1" noMove="1" noResize="1" noEditPoints="1" noAdjustHandles="1" noChangeArrowheads="1" noChangeShapeType="1" noTextEdit="1"/>
-              </p:cNvSpPr>
-              <p:nvPr/>
-            </p:nvSpPr>
-            <p:spPr>
-              <a:xfrm>
-                <a:off x="384048" y="6324219"/>
-                <a:ext cx="11423599" cy="261610"/>
-              </a:xfrm>
-              <a:prstGeom prst="rect">
-                <a:avLst/>
-              </a:prstGeom>
-              <a:blipFill>
-                <a:blip r:embed="rId5"/>
-                <a:stretch>
-                  <a:fillRect b="-13636"/>
-                </a:stretch>
-              </a:blipFill>
-            </p:spPr>
-            <p:txBody>
-              <a:bodyPr/>
-              <a:lstStyle/>
-              <a:p>
-                <a:r>
-                  <a:rPr lang="en-US">
-                    <a:noFill/>
-                  </a:rPr>
-                  <a:t> </a:t>
-                </a:r>
-              </a:p>
-            </p:txBody>
-          </p:sp>
-        </mc:Fallback>
-      </mc:AlternateContent>
+      <p:sp>
+        <p:nvSpPr>
+          <p:cNvPr id="5" name="TextBox 4"/>
+          <p:cNvSpPr txBox="1"/>
+          <p:nvPr/>
+        </p:nvSpPr>
+        <p:spPr>
+          <a:xfrm>
+            <a:off x="384048" y="5074920"/>
+            <a:ext cx="11423599" cy="960120"/>
+          </a:xfrm>
+          <a:prstGeom prst="rect">
+            <a:avLst/>
+          </a:prstGeom>
+          <a:noFill/>
+        </p:spPr>
+        <p:txBody>
+          <a:bodyPr wrap="square">
+            <a:spAutoFit/>
+          </a:bodyPr>
+          <a:lstStyle/>
+          <a:p>
+            <a:pPr>
+              <a:buChar char="•"/>
+              <a:lnSpc>
+                <a:spcPct val="150000"/>
+              </a:lnSpc>
+              <a:spcBef>
+                <a:spcPts val="0"/>
+              </a:spcBef>
+              <a:spcAft>
+                <a:spcPts val="0"/>
+              </a:spcAft>
+            </a:pPr>
+            <a:r>
+              <a:rPr sz="1000" b="0" i="0" baseline="0">
+                <a:latin typeface="Calibri"/>
+              </a:rPr>
+              <a:t>  PD22 backup (SCOUT Aug 2026): frozen \texttt{mbb\_df\_player\_box.csv} — season coverage for $\rho$ timeseries jump.</a:t>
+            </a:r>
+          </a:p>
+          <a:p>
+            <a:pPr>
+              <a:buChar char="•"/>
+              <a:lnSpc>
+                <a:spcPct val="150000"/>
+              </a:lnSpc>
+              <a:spcBef>
+                <a:spcPts val="0"/>
+              </a:spcBef>
+              <a:spcAft>
+                <a:spcPts val="0"/>
+              </a:spcAft>
+            </a:pPr>
+            <a:r>
+              <a:rPr sz="1000" b="0" i="0" baseline="0">
+                <a:latin typeface="Calibri"/>
+              </a:rPr>
+              <a:t>  Source: distinct player-season rows aggregated from ESPN box (2011–2021); CSV not rewritten on disk.</a:t>
+            </a:r>
+          </a:p>
+          <a:p>
+            <a:pPr>
+              <a:buChar char="•"/>
+              <a:lnSpc>
+                <a:spcPct val="150000"/>
+              </a:lnSpc>
+              <a:spcBef>
+                <a:spcPts val="0"/>
+              </a:spcBef>
+              <a:spcAft>
+                <a:spcPts val="0"/>
+              </a:spcAft>
+            </a:pPr>
+            <a:r>
+              <a:rPr sz="1000" b="0" i="0" baseline="0">
+                <a:latin typeface="Calibri"/>
+              </a:rPr>
+              <a:t>  2013→2014 raw player-seasons: $5,801\rightarrow10,633$ ($83.3\%$); games $3.4\%$ only.</a:t>
+            </a:r>
+          </a:p>
+          <a:p>
+            <a:pPr>
+              <a:buChar char="•"/>
+              <a:lnSpc>
+                <a:spcPct val="150000"/>
+              </a:lnSpc>
+              <a:spcBef>
+                <a:spcPts val="0"/>
+              </a:spcBef>
+              <a:spcAft>
+                <a:spcPts val="0"/>
+              </a:spcAft>
+            </a:pPr>
+            <a:r>
+              <a:rPr sz="1000" b="0" i="0" baseline="0">
+                <a:latin typeface="Calibri"/>
+              </a:rPr>
+              <a:t>  Roster depth: median players/team-season $23.1\%$; mean box rows/game/team $15.9\%$ — ESPN lists more bench lines from 2014.</a:t>
+            </a:r>
+          </a:p>
+          <a:p>
+            <a:pPr>
+              <a:buChar char="•"/>
+              <a:lnSpc>
+                <a:spcPct val="150000"/>
+              </a:lnSpc>
+              <a:spcBef>
+                <a:spcPts val="0"/>
+              </a:spcBef>
+              <a:spcAft>
+                <a:spcPts val="0"/>
+              </a:spcAft>
+            </a:pPr>
+            <a:r>
+              <a:rPr sz="1000" b="0" i="0" baseline="0">
+                <a:latin typeface="Calibri"/>
+              </a:rPr>
+              <a:t>  Overlap teams only ($464$ schools): player-seasons $5,388\rightarrow7,783$ (+44\% on same team\_ids).</a:t>
+            </a:r>
+          </a:p>
+          <a:p>
+            <a:pPr>
+              <a:buChar char="•"/>
+              <a:lnSpc>
+                <a:spcPct val="150000"/>
+              </a:lnSpc>
+              <a:spcBef>
+                <a:spcPts val="0"/>
+              </a:spcBef>
+              <a:spcAft>
+                <a:spcPts val="0"/>
+              </a:spcAft>
+            </a:pPr>
+            <a:r>
+              <a:rPr sz="1000" b="0" i="0" baseline="0">
+                <a:latin typeface="Calibri"/>
+              </a:rPr>
+              <a:t>  Hero panel (box QC + min $\geq 20$): $4,135\rightarrow4,248$ ($2.7\%$).</a:t>
+            </a:r>
+          </a:p>
+          <a:p>
+            <a:pPr>
+              <a:buChar char="•"/>
+              <a:lnSpc>
+                <a:spcPct val="150000"/>
+              </a:lnSpc>
+              <a:spcBef>
+                <a:spcPts val="0"/>
+              </a:spcBef>
+              <a:spcAft>
+                <a:spcPts val="0"/>
+              </a:spcAft>
+            </a:pPr>
+            <a:r>
+              <a:rPr sz="1000" b="0" i="0" baseline="0">
+                <a:latin typeface="Calibri"/>
+              </a:rPr>
+              <a:t>  Left: raw aggregate jumps at 2014; orange min-20 line flat — use for PD21 $\rho$ calibration, not ppm0lt20.</a:t>
+            </a:r>
+          </a:p>
+          <a:p>
+            <a:pPr>
+              <a:buChar char="•"/>
+              <a:lnSpc>
+                <a:spcPct val="150000"/>
+              </a:lnSpc>
+              <a:spcBef>
+                <a:spcPts val="0"/>
+              </a:spcBef>
+              <a:spcAft>
+                <a:spcPts val="0"/>
+              </a:spcAft>
+            </a:pPr>
+            <a:r>
+              <a:rPr sz="1000" b="0" i="0" baseline="0">
+                <a:latin typeface="Calibri"/>
+              </a:rPr>
+              <a:t>  Right: median roster size and rows/game/team — SCOUT verify against ESPN API sample games 2013 vs 2014.</a:t>
+            </a:r>
+          </a:p>
+        </p:txBody>
+      </p:sp>
+      <p:sp>
+        <p:nvSpPr>
+          <p:cNvPr id="6" name="TextBox 5"/>
+          <p:cNvSpPr txBox="1"/>
+          <p:nvPr/>
+        </p:nvSpPr>
+        <p:spPr>
+          <a:xfrm>
+            <a:off x="384048" y="6089904"/>
+            <a:ext cx="11423599" cy="384048"/>
+          </a:xfrm>
+          <a:prstGeom prst="rect">
+            <a:avLst/>
+          </a:prstGeom>
+          <a:noFill/>
+        </p:spPr>
+        <p:txBody>
+          <a:bodyPr wrap="square">
+            <a:spAutoFit/>
+          </a:bodyPr>
+          <a:lstStyle/>
+          <a:p>
+            <a:pPr algn="l"/>
+            <a:r>
+              <a:rPr sz="1100" b="1" i="0" baseline="0">
+                <a:latin typeface="Calibri"/>
+              </a:rPr>
+              <a:t>Claim (PD22 backup): 2013→2014 jump in raw player-season counts is ESPN box **depth** (more players listed per game), not doubled games — hero min-20 panel is longitudinal-safe for $\rho$ / $H_{\mathrm{sort}}$.</a:t>
+            </a:r>
+          </a:p>
+        </p:txBody>
+      </p:sp>
     </p:spTree>
   </p:cSld>
   <p:clrMapOvr>
